--- a/m1/diapositivos/sessao-02-m1-f02.pptx
+++ b/m1/diapositivos/sessao-02-m1-f02.pptx
@@ -4874,13 +4874,10 @@
               <a:lnSpc>
                 <a:spcPct val="120000"/>
               </a:lnSpc>
-              <a:spcAft>
-                <a:spcPts val="1000"/>
-              </a:spcAft>
-              <a:buNone/>
-            </a:pPr>
-            <a:r>
-              <a:rPr lang="en-US" sz="2300" dirty="0">
+              <a:buNone/>
+            </a:pPr>
+            <a:r>
+              <a:rPr lang="en-US" sz="2300" b="1" dirty="0">
                 <a:solidFill>
                   <a:srgbClr val="F2F0EA"/>
                 </a:solidFill>
@@ -4888,18 +4885,12 @@
                 <a:ea typeface="Georgia" pitchFamily="34" charset="-122"/>
                 <a:cs typeface="Georgia" pitchFamily="34" charset="-120"/>
               </a:rPr>
-              <a:t>Refrão: o verso que se repete no fim de cada estrofe.</a:t>
-            </a:r>
-            <a:endParaRPr lang="en-US" sz="2300" dirty="0"/>
-          </a:p>
-          <a:p>
+              <a:t>Refrão</a:t>
+            </a:r>
             <a:pPr indent="0" marL="0">
               <a:lnSpc>
                 <a:spcPct val="120000"/>
               </a:lnSpc>
-              <a:spcAft>
-                <a:spcPts val="1000"/>
-              </a:spcAft>
               <a:buNone/>
             </a:pPr>
             <a:r>
@@ -4911,22 +4902,16 @@
                 <a:ea typeface="Georgia" pitchFamily="34" charset="-122"/>
                 <a:cs typeface="Georgia" pitchFamily="34" charset="-120"/>
               </a:rPr>
-              <a:t>Paralelismo: duas estrofes seguidas dizem quase o mesmo, com uma ou duas palavras trocadas.</a:t>
-            </a:r>
-            <a:endParaRPr lang="en-US" sz="2300" dirty="0"/>
-          </a:p>
-          <a:p>
+              <a:t>: o verso que se repete no fim de cada estrofe. </a:t>
+            </a:r>
             <a:pPr indent="0" marL="0">
               <a:lnSpc>
                 <a:spcPct val="120000"/>
               </a:lnSpc>
-              <a:spcAft>
-                <a:spcPts val="1000"/>
-              </a:spcAft>
-              <a:buNone/>
-            </a:pPr>
-            <a:r>
-              <a:rPr lang="en-US" sz="2300" dirty="0">
+              <a:buNone/>
+            </a:pPr>
+            <a:r>
+              <a:rPr lang="en-US" sz="2300" b="1" dirty="0">
                 <a:solidFill>
                   <a:srgbClr val="F2F0EA"/>
                 </a:solidFill>
@@ -4934,7 +4919,58 @@
                 <a:ea typeface="Georgia" pitchFamily="34" charset="-122"/>
                 <a:cs typeface="Georgia" pitchFamily="34" charset="-120"/>
               </a:rPr>
-              <a:t>Natureza confidente: nas cantigas de amigo, a rapariga fala com o mar, as flores ou as aves como se fossem amigas.</a:t>
+              <a:t>Paralelismo</a:t>
+            </a:r>
+            <a:pPr indent="0" marL="0">
+              <a:lnSpc>
+                <a:spcPct val="120000"/>
+              </a:lnSpc>
+              <a:buNone/>
+            </a:pPr>
+            <a:r>
+              <a:rPr lang="en-US" sz="2300" dirty="0">
+                <a:solidFill>
+                  <a:srgbClr val="F2F0EA"/>
+                </a:solidFill>
+                <a:latin typeface="Georgia" pitchFamily="34" charset="0"/>
+                <a:ea typeface="Georgia" pitchFamily="34" charset="-122"/>
+                <a:cs typeface="Georgia" pitchFamily="34" charset="-120"/>
+              </a:rPr>
+              <a:t>: duas estrofes seguidas dizem quase o mesmo, com uma ou duas palavras trocadas. </a:t>
+            </a:r>
+            <a:pPr indent="0" marL="0">
+              <a:lnSpc>
+                <a:spcPct val="120000"/>
+              </a:lnSpc>
+              <a:buNone/>
+            </a:pPr>
+            <a:r>
+              <a:rPr lang="en-US" sz="2300" b="1" dirty="0">
+                <a:solidFill>
+                  <a:srgbClr val="F2F0EA"/>
+                </a:solidFill>
+                <a:latin typeface="Georgia" pitchFamily="34" charset="0"/>
+                <a:ea typeface="Georgia" pitchFamily="34" charset="-122"/>
+                <a:cs typeface="Georgia" pitchFamily="34" charset="-120"/>
+              </a:rPr>
+              <a:t>Natureza confidente</a:t>
+            </a:r>
+            <a:pPr indent="0" marL="0">
+              <a:lnSpc>
+                <a:spcPct val="120000"/>
+              </a:lnSpc>
+              <a:buNone/>
+            </a:pPr>
+            <a:r>
+              <a:rPr lang="en-US" sz="2300" dirty="0">
+                <a:solidFill>
+                  <a:srgbClr val="F2F0EA"/>
+                </a:solidFill>
+                <a:latin typeface="Georgia" pitchFamily="34" charset="0"/>
+                <a:ea typeface="Georgia" pitchFamily="34" charset="-122"/>
+                <a:cs typeface="Georgia" pitchFamily="34" charset="-120"/>
+              </a:rPr>
+              <a:t>: nas cantigas de amigo, a rapariga fala com o mar, as flores ou as aves como se fossem amigas.</a:t>
             </a:r>
             <a:endParaRPr lang="en-US" sz="2300" dirty="0"/>
           </a:p>
@@ -6680,7 +6716,41 @@
                 <a:ea typeface="Georgia" pitchFamily="34" charset="-122"/>
                 <a:cs typeface="Georgia" pitchFamily="34" charset="-120"/>
               </a:rPr>
-              <a:t>Agora fala o amigo, longe. Quatro versos em paralelismo, com um refrão que responda ao dela. Usa pelo menos duas palavras da cantiga. Um começo feito, para veres o modelo: «Cercarom-mi as serras, que altas som! / Eu atendendo mia amiga, eu atendendo.» Os teus versos passam-se noutro lugar, não nas serras.</a:t>
+              <a:t>Agora fala o </a:t>
+            </a:r>
+            <a:pPr indent="0" marL="0">
+              <a:lnSpc>
+                <a:spcPct val="120000"/>
+              </a:lnSpc>
+              <a:buNone/>
+            </a:pPr>
+            <a:r>
+              <a:rPr lang="en-US" sz="2400" b="1" dirty="0">
+                <a:solidFill>
+                  <a:srgbClr val="F2F0EA"/>
+                </a:solidFill>
+                <a:latin typeface="Georgia" pitchFamily="34" charset="0"/>
+                <a:ea typeface="Georgia" pitchFamily="34" charset="-122"/>
+                <a:cs typeface="Georgia" pitchFamily="34" charset="-120"/>
+              </a:rPr>
+              <a:t>amigo</a:t>
+            </a:r>
+            <a:pPr indent="0" marL="0">
+              <a:lnSpc>
+                <a:spcPct val="120000"/>
+              </a:lnSpc>
+              <a:buNone/>
+            </a:pPr>
+            <a:r>
+              <a:rPr lang="en-US" sz="2400" dirty="0">
+                <a:solidFill>
+                  <a:srgbClr val="F2F0EA"/>
+                </a:solidFill>
+                <a:latin typeface="Georgia" pitchFamily="34" charset="0"/>
+                <a:ea typeface="Georgia" pitchFamily="34" charset="-122"/>
+                <a:cs typeface="Georgia" pitchFamily="34" charset="-120"/>
+              </a:rPr>
+              <a:t>, longe. Quatro versos em paralelismo, com um refrão que responda ao dela. Usa pelo menos duas palavras da cantiga. Um começo feito, para veres o modelo: «Cercarom-mi as serras, que altas som! / Eu atendendo mia amiga, eu atendendo.» Os teus versos passam-se noutro lugar, não nas serras.</a:t>
             </a:r>
             <a:endParaRPr lang="en-US" sz="2400" dirty="0"/>
           </a:p>
